--- a/time-watch-security-and-validation-overview.pptx
+++ b/time-watch-security-and-validation-overview.pptx
@@ -1442,7 +1442,7 @@
               </a:defRPr>
             </a:pPr>
             <a:r>
-              <a:rPr sz="825" b="0">
+              <a:rPr sz="825" b="0" dirty="0">
                 <a:solidFill>
                   <a:srgbClr val="6B7280"/>
                 </a:solidFill>
@@ -3224,7 +3224,7 @@
               </a:defRPr>
             </a:pPr>
             <a:r>
-              <a:rPr sz="975" b="0">
+              <a:rPr sz="975" b="0" dirty="0">
                 <a:solidFill>
                   <a:srgbClr val="6B7280"/>
                 </a:solidFill>
@@ -3560,7 +3560,7 @@
               </a:defRPr>
             </a:pPr>
             <a:r>
-              <a:rPr sz="975" b="0">
+              <a:rPr sz="975" b="0" dirty="0">
                 <a:solidFill>
                   <a:srgbClr val="6B7280"/>
                 </a:solidFill>
@@ -3568,7 +3568,7 @@
                 <a:ea typeface="Aptos"/>
                 <a:cs typeface="Aptos"/>
               </a:rPr>
-              <a:t>Users, task hierarchy, reports, absences, month locks</a:t>
+              <a:t>Users, task hierarchy, reports, absences</a:t>
             </a:r>
           </a:p>
         </p:txBody>
@@ -7064,7 +7064,7 @@
               </a:defRPr>
             </a:pPr>
             <a:r>
-              <a:rPr sz="1125" b="0">
+              <a:rPr sz="1125" b="0" dirty="0">
                 <a:solidFill>
                   <a:srgbClr val="6B7280"/>
                 </a:solidFill>
@@ -7072,7 +7072,7 @@
                 <a:ea typeface="Aptos"/>
                 <a:cs typeface="Aptos"/>
               </a:rPr>
-              <a:t>- admin report editing and month locking routes</a:t>
+              <a:t>- admin report editing routes</a:t>
             </a:r>
           </a:p>
         </p:txBody>
@@ -9273,30 +9273,7 @@
               </a:defRPr>
             </a:pPr>
             <a:r>
-              <a:rPr sz="1050" b="0">
-                <a:solidFill>
-                  <a:srgbClr val="15803D"/>
-                </a:solidFill>
-                <a:latin typeface="Aptos"/>
-                <a:ea typeface="Aptos"/>
-                <a:cs typeface="Aptos"/>
-              </a:rPr>
-              <a:t>423 month lock</a:t>
-            </a:r>
-          </a:p>
-          <a:p>
-            <a:pPr algn="ctr">
-              <a:defRPr sz="1050" b="0">
-                <a:solidFill>
-                  <a:srgbClr val="15803D"/>
-                </a:solidFill>
-                <a:latin typeface="Aptos"/>
-                <a:ea typeface="Aptos"/>
-                <a:cs typeface="Aptos"/>
-              </a:defRPr>
-            </a:pPr>
-            <a:r>
-              <a:rPr sz="1050" b="0">
+              <a:rPr sz="1050" b="0" dirty="0">
                 <a:solidFill>
                   <a:srgbClr val="15803D"/>
                 </a:solidFill>
@@ -10217,7 +10194,7 @@
               </a:defRPr>
             </a:pPr>
             <a:r>
-              <a:rPr sz="1200" b="0">
+              <a:rPr sz="1200" b="0" dirty="0">
                 <a:solidFill>
                   <a:srgbClr val="6B7280"/>
                 </a:solidFill>
@@ -10225,7 +10202,7 @@
                 <a:ea typeface="Aptos"/>
                 <a:cs typeface="Aptos"/>
               </a:rPr>
-              <a:t>Time and absence routes enforce month locks, ownership, date validity, and constrained edits.</a:t>
+              <a:t>Time and absence routes enforce ownership, date validity, and constrained edits.</a:t>
             </a:r>
           </a:p>
         </p:txBody>
@@ -12986,110 +12963,6 @@
                 <a:cs typeface="Aptos"/>
               </a:rPr>
               <a:t>saved entry</a:t>
-            </a:r>
-          </a:p>
-        </p:txBody>
-      </p:sp>
-      <p:sp>
-        <p:nvSpPr>
-          <p:cNvPr id="66" name="Rectangle 65">
-            <a:extLst>
-              <a:ext uri="{FF2B5EF4-FFF2-40B4-BE49-F238E27FC236}">
-                <a16:creationId xmlns:a16="http://schemas.microsoft.com/office/drawing/2014/main" id="{FFFD0902-DAB2-4C38-B31B-AAABEC2B5944}"/>
-              </a:ext>
-            </a:extLst>
-          </p:cNvPr>
-          <p:cNvSpPr>
-            <a:spLocks noGrp="1"/>
-          </p:cNvSpPr>
-          <p:nvPr/>
-        </p:nvSpPr>
-        <p:spPr>
-          <a:xfrm>
-            <a:off x="7810500" y="5219700"/>
-            <a:ext cx="2857500" cy="514350"/>
-          </a:xfrm>
-          <a:prstGeom prst="rect">
-            <a:avLst/>
-          </a:prstGeom>
-          <a:solidFill>
-            <a:srgbClr val="101827"/>
-          </a:solidFill>
-          <a:ln w="9525">
-            <a:solidFill>
-              <a:srgbClr val="101827"/>
-            </a:solidFill>
-            <a:prstDash val="solid"/>
-          </a:ln>
-        </p:spPr>
-        <p:txBody>
-          <a:bodyPr/>
-          <a:lstStyle/>
-          <a:p>
-            <a:endParaRPr lang="LID4096"/>
-          </a:p>
-        </p:txBody>
-      </p:sp>
-      <p:sp>
-        <p:nvSpPr>
-          <p:cNvPr id="67" name="Rectangle 66">
-            <a:extLst>
-              <a:ext uri="{FF2B5EF4-FFF2-40B4-BE49-F238E27FC236}">
-                <a16:creationId xmlns:a16="http://schemas.microsoft.com/office/drawing/2014/main" id="{AE9F1EAE-37F3-4C55-9D21-1111BE8EB236}"/>
-              </a:ext>
-            </a:extLst>
-          </p:cNvPr>
-          <p:cNvSpPr>
-            <a:spLocks noGrp="1"/>
-          </p:cNvSpPr>
-          <p:nvPr/>
-        </p:nvSpPr>
-        <p:spPr>
-          <a:xfrm>
-            <a:off x="8001000" y="5353050"/>
-            <a:ext cx="2476500" cy="342900"/>
-          </a:xfrm>
-          <a:prstGeom prst="rect">
-            <a:avLst/>
-          </a:prstGeom>
-          <a:solidFill>
-            <a:srgbClr val="000000">
-              <a:alpha val="0"/>
-            </a:srgbClr>
-          </a:solidFill>
-          <a:ln w="0">
-            <a:solidFill>
-              <a:srgbClr val="000000">
-                <a:alpha val="0"/>
-              </a:srgbClr>
-            </a:solidFill>
-            <a:prstDash val="solid"/>
-          </a:ln>
-        </p:spPr>
-        <p:txBody>
-          <a:bodyPr lIns="0" tIns="0" rIns="0" bIns="0" anchor="t"/>
-          <a:lstStyle/>
-          <a:p>
-            <a:pPr algn="l">
-              <a:defRPr sz="1050" b="1">
-                <a:solidFill>
-                  <a:srgbClr val="FFFFFF"/>
-                </a:solidFill>
-                <a:latin typeface="Aptos"/>
-                <a:ea typeface="Aptos"/>
-                <a:cs typeface="Aptos"/>
-              </a:defRPr>
-            </a:pPr>
-            <a:r>
-              <a:rPr sz="1050" b="1">
-                <a:solidFill>
-                  <a:srgbClr val="FFFFFF"/>
-                </a:solidFill>
-                <a:latin typeface="Aptos"/>
-                <a:ea typeface="Aptos"/>
-                <a:cs typeface="Aptos"/>
-              </a:rPr>
-              <a:t>Month lock returns 423 before mutation across reports and absences.</a:t>
             </a:r>
           </a:p>
         </p:txBody>

--- a/time-watch-security-and-validation-overview.pptx
+++ b/time-watch-security-and-validation-overview.pptx
@@ -1393,70 +1393,6 @@
       </p:sp>
       <p:sp>
         <p:nvSpPr>
-          <p:cNvPr id="4" name="Rectangle 3">
-            <a:extLst>
-              <a:ext uri="{FF2B5EF4-FFF2-40B4-BE49-F238E27FC236}">
-                <a16:creationId xmlns:a16="http://schemas.microsoft.com/office/drawing/2014/main" id="{0468987A-31FC-45EE-AD8F-B8985AEDB2CC}"/>
-              </a:ext>
-            </a:extLst>
-          </p:cNvPr>
-          <p:cNvSpPr>
-            <a:spLocks noGrp="1"/>
-          </p:cNvSpPr>
-          <p:nvPr/>
-        </p:nvSpPr>
-        <p:spPr>
-          <a:xfrm>
-            <a:off x="609600" y="6019800"/>
-            <a:ext cx="6096000" cy="190500"/>
-          </a:xfrm>
-          <a:prstGeom prst="rect">
-            <a:avLst/>
-          </a:prstGeom>
-          <a:solidFill>
-            <a:srgbClr val="000000">
-              <a:alpha val="0"/>
-            </a:srgbClr>
-          </a:solidFill>
-          <a:ln w="0">
-            <a:solidFill>
-              <a:srgbClr val="000000">
-                <a:alpha val="0"/>
-              </a:srgbClr>
-            </a:solidFill>
-            <a:prstDash val="solid"/>
-          </a:ln>
-        </p:spPr>
-        <p:txBody>
-          <a:bodyPr lIns="0" tIns="0" rIns="0" bIns="0" anchor="t"/>
-          <a:lstStyle/>
-          <a:p>
-            <a:pPr algn="l">
-              <a:defRPr sz="825" b="0">
-                <a:solidFill>
-                  <a:srgbClr val="6B7280"/>
-                </a:solidFill>
-                <a:latin typeface="Aptos"/>
-                <a:ea typeface="Aptos"/>
-                <a:cs typeface="Aptos"/>
-              </a:defRPr>
-            </a:pPr>
-            <a:r>
-              <a:rPr sz="825" b="0" dirty="0">
-                <a:solidFill>
-                  <a:srgbClr val="6B7280"/>
-                </a:solidFill>
-                <a:latin typeface="Aptos"/>
-                <a:ea typeface="Aptos"/>
-                <a:cs typeface="Aptos"/>
-              </a:rPr>
-              <a:t>Time Watch / dev branch / security &amp; validation review</a:t>
-            </a:r>
-          </a:p>
-        </p:txBody>
-      </p:sp>
-      <p:sp>
-        <p:nvSpPr>
           <p:cNvPr id="5" name="kicker-marker">
             <a:extLst>
               <a:ext uri="{FF2B5EF4-FFF2-40B4-BE49-F238E27FC236}">
@@ -2580,7 +2516,7 @@
               </a:defRPr>
             </a:pPr>
             <a:r>
-              <a:rPr sz="825" b="0">
+              <a:rPr sz="825" b="0" dirty="0">
                 <a:solidFill>
                   <a:srgbClr val="6B7280"/>
                 </a:solidFill>
@@ -2625,10 +2561,10 @@
       </p:grpSpPr>
       <p:sp>
         <p:nvSpPr>
-          <p:cNvPr id="31" name="Rectangle 30">
-            <a:extLst>
-              <a:ext uri="{FF2B5EF4-FFF2-40B4-BE49-F238E27FC236}">
-                <a16:creationId xmlns:a16="http://schemas.microsoft.com/office/drawing/2014/main" id="{EABFBB53-248D-466D-9FB0-DBA2666C2DAE}"/>
+          <p:cNvPr id="32" name="Rectangle 31">
+            <a:extLst>
+              <a:ext uri="{FF2B5EF4-FFF2-40B4-BE49-F238E27FC236}">
+                <a16:creationId xmlns:a16="http://schemas.microsoft.com/office/drawing/2014/main" id="{55076523-5D7D-7162-C59B-A042937810F2}"/>
               </a:ext>
             </a:extLst>
           </p:cNvPr>
@@ -2768,70 +2704,6 @@
           <a:lstStyle/>
           <a:p>
             <a:endParaRPr lang="LID4096"/>
-          </a:p>
-        </p:txBody>
-      </p:sp>
-      <p:sp>
-        <p:nvSpPr>
-          <p:cNvPr id="4" name="Rectangle 3">
-            <a:extLst>
-              <a:ext uri="{FF2B5EF4-FFF2-40B4-BE49-F238E27FC236}">
-                <a16:creationId xmlns:a16="http://schemas.microsoft.com/office/drawing/2014/main" id="{D898CC2A-D6E1-471E-88D1-E7357B57A160}"/>
-              </a:ext>
-            </a:extLst>
-          </p:cNvPr>
-          <p:cNvSpPr>
-            <a:spLocks noGrp="1"/>
-          </p:cNvSpPr>
-          <p:nvPr/>
-        </p:nvSpPr>
-        <p:spPr>
-          <a:xfrm>
-            <a:off x="609600" y="6019800"/>
-            <a:ext cx="6096000" cy="190500"/>
-          </a:xfrm>
-          <a:prstGeom prst="rect">
-            <a:avLst/>
-          </a:prstGeom>
-          <a:solidFill>
-            <a:srgbClr val="000000">
-              <a:alpha val="0"/>
-            </a:srgbClr>
-          </a:solidFill>
-          <a:ln w="0">
-            <a:solidFill>
-              <a:srgbClr val="000000">
-                <a:alpha val="0"/>
-              </a:srgbClr>
-            </a:solidFill>
-            <a:prstDash val="solid"/>
-          </a:ln>
-        </p:spPr>
-        <p:txBody>
-          <a:bodyPr lIns="0" tIns="0" rIns="0" bIns="0" anchor="t"/>
-          <a:lstStyle/>
-          <a:p>
-            <a:pPr algn="l">
-              <a:defRPr sz="825" b="0">
-                <a:solidFill>
-                  <a:srgbClr val="6B7280"/>
-                </a:solidFill>
-                <a:latin typeface="Aptos"/>
-                <a:ea typeface="Aptos"/>
-                <a:cs typeface="Aptos"/>
-              </a:defRPr>
-            </a:pPr>
-            <a:r>
-              <a:rPr sz="825" b="0">
-                <a:solidFill>
-                  <a:srgbClr val="6B7280"/>
-                </a:solidFill>
-                <a:latin typeface="Aptos"/>
-                <a:ea typeface="Aptos"/>
-                <a:cs typeface="Aptos"/>
-              </a:rPr>
-              <a:t>Time Watch / dev branch / security &amp; validation review</a:t>
-            </a:r>
           </a:p>
         </p:txBody>
       </p:sp>
@@ -4429,70 +4301,6 @@
       </p:sp>
       <p:sp>
         <p:nvSpPr>
-          <p:cNvPr id="4" name="Rectangle 3">
-            <a:extLst>
-              <a:ext uri="{FF2B5EF4-FFF2-40B4-BE49-F238E27FC236}">
-                <a16:creationId xmlns:a16="http://schemas.microsoft.com/office/drawing/2014/main" id="{FD131A97-93BD-4B9D-A2E4-DBCB7ADB7A88}"/>
-              </a:ext>
-            </a:extLst>
-          </p:cNvPr>
-          <p:cNvSpPr>
-            <a:spLocks noGrp="1"/>
-          </p:cNvSpPr>
-          <p:nvPr/>
-        </p:nvSpPr>
-        <p:spPr>
-          <a:xfrm>
-            <a:off x="609600" y="6019800"/>
-            <a:ext cx="6096000" cy="190500"/>
-          </a:xfrm>
-          <a:prstGeom prst="rect">
-            <a:avLst/>
-          </a:prstGeom>
-          <a:solidFill>
-            <a:srgbClr val="000000">
-              <a:alpha val="0"/>
-            </a:srgbClr>
-          </a:solidFill>
-          <a:ln w="0">
-            <a:solidFill>
-              <a:srgbClr val="000000">
-                <a:alpha val="0"/>
-              </a:srgbClr>
-            </a:solidFill>
-            <a:prstDash val="solid"/>
-          </a:ln>
-        </p:spPr>
-        <p:txBody>
-          <a:bodyPr lIns="0" tIns="0" rIns="0" bIns="0" anchor="t"/>
-          <a:lstStyle/>
-          <a:p>
-            <a:pPr algn="l">
-              <a:defRPr sz="825" b="0">
-                <a:solidFill>
-                  <a:srgbClr val="6B7280"/>
-                </a:solidFill>
-                <a:latin typeface="Aptos"/>
-                <a:ea typeface="Aptos"/>
-                <a:cs typeface="Aptos"/>
-              </a:defRPr>
-            </a:pPr>
-            <a:r>
-              <a:rPr sz="825" b="0">
-                <a:solidFill>
-                  <a:srgbClr val="6B7280"/>
-                </a:solidFill>
-                <a:latin typeface="Aptos"/>
-                <a:ea typeface="Aptos"/>
-                <a:cs typeface="Aptos"/>
-              </a:rPr>
-              <a:t>Time Watch / dev branch / security &amp; validation review</a:t>
-            </a:r>
-          </a:p>
-        </p:txBody>
-      </p:sp>
-      <p:sp>
-        <p:nvSpPr>
           <p:cNvPr id="5" name="kicker-marker">
             <a:extLst>
               <a:ext uri="{FF2B5EF4-FFF2-40B4-BE49-F238E27FC236}">
@@ -6189,70 +5997,6 @@
       </p:sp>
       <p:sp>
         <p:nvSpPr>
-          <p:cNvPr id="4" name="Rectangle 3">
-            <a:extLst>
-              <a:ext uri="{FF2B5EF4-FFF2-40B4-BE49-F238E27FC236}">
-                <a16:creationId xmlns:a16="http://schemas.microsoft.com/office/drawing/2014/main" id="{80106A98-EACD-435E-8900-52263E0CC017}"/>
-              </a:ext>
-            </a:extLst>
-          </p:cNvPr>
-          <p:cNvSpPr>
-            <a:spLocks noGrp="1"/>
-          </p:cNvSpPr>
-          <p:nvPr/>
-        </p:nvSpPr>
-        <p:spPr>
-          <a:xfrm>
-            <a:off x="609600" y="6019800"/>
-            <a:ext cx="6096000" cy="190500"/>
-          </a:xfrm>
-          <a:prstGeom prst="rect">
-            <a:avLst/>
-          </a:prstGeom>
-          <a:solidFill>
-            <a:srgbClr val="000000">
-              <a:alpha val="0"/>
-            </a:srgbClr>
-          </a:solidFill>
-          <a:ln w="0">
-            <a:solidFill>
-              <a:srgbClr val="000000">
-                <a:alpha val="0"/>
-              </a:srgbClr>
-            </a:solidFill>
-            <a:prstDash val="solid"/>
-          </a:ln>
-        </p:spPr>
-        <p:txBody>
-          <a:bodyPr lIns="0" tIns="0" rIns="0" bIns="0" anchor="t"/>
-          <a:lstStyle/>
-          <a:p>
-            <a:pPr algn="l">
-              <a:defRPr sz="825" b="0">
-                <a:solidFill>
-                  <a:srgbClr val="6B7280"/>
-                </a:solidFill>
-                <a:latin typeface="Aptos"/>
-                <a:ea typeface="Aptos"/>
-                <a:cs typeface="Aptos"/>
-              </a:defRPr>
-            </a:pPr>
-            <a:r>
-              <a:rPr sz="825" b="0">
-                <a:solidFill>
-                  <a:srgbClr val="6B7280"/>
-                </a:solidFill>
-                <a:latin typeface="Aptos"/>
-                <a:ea typeface="Aptos"/>
-                <a:cs typeface="Aptos"/>
-              </a:rPr>
-              <a:t>Time Watch / dev branch / security &amp; validation review</a:t>
-            </a:r>
-          </a:p>
-        </p:txBody>
-      </p:sp>
-      <p:sp>
-        <p:nvSpPr>
           <p:cNvPr id="5" name="kicker-marker">
             <a:extLst>
               <a:ext uri="{FF2B5EF4-FFF2-40B4-BE49-F238E27FC236}">
@@ -7489,70 +7233,6 @@
       </p:sp>
       <p:sp>
         <p:nvSpPr>
-          <p:cNvPr id="4" name="Rectangle 3">
-            <a:extLst>
-              <a:ext uri="{FF2B5EF4-FFF2-40B4-BE49-F238E27FC236}">
-                <a16:creationId xmlns:a16="http://schemas.microsoft.com/office/drawing/2014/main" id="{E4466A20-3EEB-491D-B791-F8616C67BF78}"/>
-              </a:ext>
-            </a:extLst>
-          </p:cNvPr>
-          <p:cNvSpPr>
-            <a:spLocks noGrp="1"/>
-          </p:cNvSpPr>
-          <p:nvPr/>
-        </p:nvSpPr>
-        <p:spPr>
-          <a:xfrm>
-            <a:off x="609600" y="6019800"/>
-            <a:ext cx="6096000" cy="190500"/>
-          </a:xfrm>
-          <a:prstGeom prst="rect">
-            <a:avLst/>
-          </a:prstGeom>
-          <a:solidFill>
-            <a:srgbClr val="000000">
-              <a:alpha val="0"/>
-            </a:srgbClr>
-          </a:solidFill>
-          <a:ln w="0">
-            <a:solidFill>
-              <a:srgbClr val="000000">
-                <a:alpha val="0"/>
-              </a:srgbClr>
-            </a:solidFill>
-            <a:prstDash val="solid"/>
-          </a:ln>
-        </p:spPr>
-        <p:txBody>
-          <a:bodyPr lIns="0" tIns="0" rIns="0" bIns="0" anchor="t"/>
-          <a:lstStyle/>
-          <a:p>
-            <a:pPr algn="l">
-              <a:defRPr sz="825" b="0">
-                <a:solidFill>
-                  <a:srgbClr val="6B7280"/>
-                </a:solidFill>
-                <a:latin typeface="Aptos"/>
-                <a:ea typeface="Aptos"/>
-                <a:cs typeface="Aptos"/>
-              </a:defRPr>
-            </a:pPr>
-            <a:r>
-              <a:rPr sz="825" b="0">
-                <a:solidFill>
-                  <a:srgbClr val="6B7280"/>
-                </a:solidFill>
-                <a:latin typeface="Aptos"/>
-                <a:ea typeface="Aptos"/>
-                <a:cs typeface="Aptos"/>
-              </a:rPr>
-              <a:t>Time Watch / dev branch / security &amp; validation review</a:t>
-            </a:r>
-          </a:p>
-        </p:txBody>
-      </p:sp>
-      <p:sp>
-        <p:nvSpPr>
           <p:cNvPr id="5" name="kicker-marker">
             <a:extLst>
               <a:ext uri="{FF2B5EF4-FFF2-40B4-BE49-F238E27FC236}">
@@ -9911,70 +9591,6 @@
       </p:sp>
       <p:sp>
         <p:nvSpPr>
-          <p:cNvPr id="4" name="Rectangle 3">
-            <a:extLst>
-              <a:ext uri="{FF2B5EF4-FFF2-40B4-BE49-F238E27FC236}">
-                <a16:creationId xmlns:a16="http://schemas.microsoft.com/office/drawing/2014/main" id="{FB153923-5AF3-443C-88E9-AA654326C025}"/>
-              </a:ext>
-            </a:extLst>
-          </p:cNvPr>
-          <p:cNvSpPr>
-            <a:spLocks noGrp="1"/>
-          </p:cNvSpPr>
-          <p:nvPr/>
-        </p:nvSpPr>
-        <p:spPr>
-          <a:xfrm>
-            <a:off x="609600" y="6019800"/>
-            <a:ext cx="6096000" cy="190500"/>
-          </a:xfrm>
-          <a:prstGeom prst="rect">
-            <a:avLst/>
-          </a:prstGeom>
-          <a:solidFill>
-            <a:srgbClr val="000000">
-              <a:alpha val="0"/>
-            </a:srgbClr>
-          </a:solidFill>
-          <a:ln w="0">
-            <a:solidFill>
-              <a:srgbClr val="000000">
-                <a:alpha val="0"/>
-              </a:srgbClr>
-            </a:solidFill>
-            <a:prstDash val="solid"/>
-          </a:ln>
-        </p:spPr>
-        <p:txBody>
-          <a:bodyPr lIns="0" tIns="0" rIns="0" bIns="0" anchor="t"/>
-          <a:lstStyle/>
-          <a:p>
-            <a:pPr algn="l">
-              <a:defRPr sz="825" b="0">
-                <a:solidFill>
-                  <a:srgbClr val="6B7280"/>
-                </a:solidFill>
-                <a:latin typeface="Aptos"/>
-                <a:ea typeface="Aptos"/>
-                <a:cs typeface="Aptos"/>
-              </a:defRPr>
-            </a:pPr>
-            <a:r>
-              <a:rPr sz="825" b="0">
-                <a:solidFill>
-                  <a:srgbClr val="6B7280"/>
-                </a:solidFill>
-                <a:latin typeface="Aptos"/>
-                <a:ea typeface="Aptos"/>
-                <a:cs typeface="Aptos"/>
-              </a:rPr>
-              <a:t>Time Watch / dev branch / security &amp; validation review</a:t>
-            </a:r>
-          </a:p>
-        </p:txBody>
-      </p:sp>
-      <p:sp>
-        <p:nvSpPr>
           <p:cNvPr id="5" name="kicker-marker">
             <a:extLst>
               <a:ext uri="{FF2B5EF4-FFF2-40B4-BE49-F238E27FC236}">
@@ -13147,70 +12763,6 @@
       </p:sp>
       <p:sp>
         <p:nvSpPr>
-          <p:cNvPr id="4" name="Rectangle 3">
-            <a:extLst>
-              <a:ext uri="{FF2B5EF4-FFF2-40B4-BE49-F238E27FC236}">
-                <a16:creationId xmlns:a16="http://schemas.microsoft.com/office/drawing/2014/main" id="{BAE1BC25-9729-4481-BE7C-30C3F1C29DF7}"/>
-              </a:ext>
-            </a:extLst>
-          </p:cNvPr>
-          <p:cNvSpPr>
-            <a:spLocks noGrp="1"/>
-          </p:cNvSpPr>
-          <p:nvPr/>
-        </p:nvSpPr>
-        <p:spPr>
-          <a:xfrm>
-            <a:off x="609600" y="6019800"/>
-            <a:ext cx="6096000" cy="190500"/>
-          </a:xfrm>
-          <a:prstGeom prst="rect">
-            <a:avLst/>
-          </a:prstGeom>
-          <a:solidFill>
-            <a:srgbClr val="000000">
-              <a:alpha val="0"/>
-            </a:srgbClr>
-          </a:solidFill>
-          <a:ln w="0">
-            <a:solidFill>
-              <a:srgbClr val="000000">
-                <a:alpha val="0"/>
-              </a:srgbClr>
-            </a:solidFill>
-            <a:prstDash val="solid"/>
-          </a:ln>
-        </p:spPr>
-        <p:txBody>
-          <a:bodyPr lIns="0" tIns="0" rIns="0" bIns="0" anchor="t"/>
-          <a:lstStyle/>
-          <a:p>
-            <a:pPr algn="l">
-              <a:defRPr sz="825" b="0">
-                <a:solidFill>
-                  <a:srgbClr val="6B7280"/>
-                </a:solidFill>
-                <a:latin typeface="Aptos"/>
-                <a:ea typeface="Aptos"/>
-                <a:cs typeface="Aptos"/>
-              </a:defRPr>
-            </a:pPr>
-            <a:r>
-              <a:rPr sz="825" b="0">
-                <a:solidFill>
-                  <a:srgbClr val="6B7280"/>
-                </a:solidFill>
-                <a:latin typeface="Aptos"/>
-                <a:ea typeface="Aptos"/>
-                <a:cs typeface="Aptos"/>
-              </a:rPr>
-              <a:t>Time Watch / dev branch / security &amp; validation review</a:t>
-            </a:r>
-          </a:p>
-        </p:txBody>
-      </p:sp>
-      <p:sp>
-        <p:nvSpPr>
           <p:cNvPr id="5" name="kicker-marker">
             <a:extLst>
               <a:ext uri="{FF2B5EF4-FFF2-40B4-BE49-F238E27FC236}">
@@ -14102,7 +13654,7 @@
               </a:defRPr>
             </a:pPr>
             <a:r>
-              <a:rPr sz="975" b="0">
+              <a:rPr sz="975" b="0" dirty="0">
                 <a:solidFill>
                   <a:srgbClr val="111827"/>
                 </a:solidFill>
@@ -14110,7 +13662,29 @@
                 <a:ea typeface="Aptos"/>
                 <a:cs typeface="Aptos"/>
               </a:rPr>
-              <a:t>admin audit and month-lock migrations create accountability for protected reporting periods.</a:t>
+              <a:t>admin audit create</a:t>
+            </a:r>
+            <a:r>
+              <a:rPr lang="en-US" sz="975" b="0" dirty="0">
+                <a:solidFill>
+                  <a:srgbClr val="111827"/>
+                </a:solidFill>
+                <a:latin typeface="Aptos"/>
+                <a:ea typeface="Aptos"/>
+                <a:cs typeface="Aptos"/>
+              </a:rPr>
+              <a:t>s</a:t>
+            </a:r>
+            <a:r>
+              <a:rPr sz="975" b="0" dirty="0">
+                <a:solidFill>
+                  <a:srgbClr val="111827"/>
+                </a:solidFill>
+                <a:latin typeface="Aptos"/>
+                <a:ea typeface="Aptos"/>
+                <a:cs typeface="Aptos"/>
+              </a:rPr>
+              <a:t> accountability for protected reporting periods.</a:t>
             </a:r>
           </a:p>
         </p:txBody>
@@ -14359,70 +13933,6 @@
       </p:sp>
       <p:sp>
         <p:nvSpPr>
-          <p:cNvPr id="4" name="Rectangle 3">
-            <a:extLst>
-              <a:ext uri="{FF2B5EF4-FFF2-40B4-BE49-F238E27FC236}">
-                <a16:creationId xmlns:a16="http://schemas.microsoft.com/office/drawing/2014/main" id="{CB8A6596-079D-4BBE-A2C4-64458F010126}"/>
-              </a:ext>
-            </a:extLst>
-          </p:cNvPr>
-          <p:cNvSpPr>
-            <a:spLocks noGrp="1"/>
-          </p:cNvSpPr>
-          <p:nvPr/>
-        </p:nvSpPr>
-        <p:spPr>
-          <a:xfrm>
-            <a:off x="609600" y="6019800"/>
-            <a:ext cx="6096000" cy="190500"/>
-          </a:xfrm>
-          <a:prstGeom prst="rect">
-            <a:avLst/>
-          </a:prstGeom>
-          <a:solidFill>
-            <a:srgbClr val="000000">
-              <a:alpha val="0"/>
-            </a:srgbClr>
-          </a:solidFill>
-          <a:ln w="0">
-            <a:solidFill>
-              <a:srgbClr val="000000">
-                <a:alpha val="0"/>
-              </a:srgbClr>
-            </a:solidFill>
-            <a:prstDash val="solid"/>
-          </a:ln>
-        </p:spPr>
-        <p:txBody>
-          <a:bodyPr lIns="0" tIns="0" rIns="0" bIns="0" anchor="t"/>
-          <a:lstStyle/>
-          <a:p>
-            <a:pPr algn="l">
-              <a:defRPr sz="825" b="0">
-                <a:solidFill>
-                  <a:srgbClr val="6B7280"/>
-                </a:solidFill>
-                <a:latin typeface="Aptos"/>
-                <a:ea typeface="Aptos"/>
-                <a:cs typeface="Aptos"/>
-              </a:defRPr>
-            </a:pPr>
-            <a:r>
-              <a:rPr sz="825" b="0">
-                <a:solidFill>
-                  <a:srgbClr val="6B7280"/>
-                </a:solidFill>
-                <a:latin typeface="Aptos"/>
-                <a:ea typeface="Aptos"/>
-                <a:cs typeface="Aptos"/>
-              </a:rPr>
-              <a:t>Time Watch / dev branch / security &amp; validation review</a:t>
-            </a:r>
-          </a:p>
-        </p:txBody>
-      </p:sp>
-      <p:sp>
-        <p:nvSpPr>
           <p:cNvPr id="5" name="kicker-marker">
             <a:extLst>
               <a:ext uri="{FF2B5EF4-FFF2-40B4-BE49-F238E27FC236}">
@@ -14642,7 +14152,7 @@
               </a:defRPr>
             </a:pPr>
             <a:r>
-              <a:rPr sz="1200" b="0">
+              <a:rPr sz="1200" b="0" dirty="0" err="1">
                 <a:solidFill>
                   <a:srgbClr val="6B7280"/>
                 </a:solidFill>
@@ -14650,8 +14160,38 @@
                 <a:ea typeface="Aptos"/>
                 <a:cs typeface="Aptos"/>
               </a:rPr>
-              <a:t>Dockerized services, Swagger docs, and tests are present, while workflow commands currently tolerate failures with "|| true".</a:t>
+              <a:t>Dockerized</a:t>
             </a:r>
+            <a:r>
+              <a:rPr sz="1200" b="0" dirty="0">
+                <a:solidFill>
+                  <a:srgbClr val="6B7280"/>
+                </a:solidFill>
+                <a:latin typeface="Aptos"/>
+                <a:ea typeface="Aptos"/>
+                <a:cs typeface="Aptos"/>
+              </a:rPr>
+              <a:t> services, Swagger docs and tests are present</a:t>
+            </a:r>
+            <a:r>
+              <a:rPr lang="en-US" sz="1200" b="0" dirty="0">
+                <a:solidFill>
+                  <a:srgbClr val="6B7280"/>
+                </a:solidFill>
+                <a:latin typeface="Aptos"/>
+                <a:ea typeface="Aptos"/>
+                <a:cs typeface="Aptos"/>
+              </a:rPr>
+              <a:t>.</a:t>
+            </a:r>
+            <a:endParaRPr sz="1200" b="0" dirty="0">
+              <a:solidFill>
+                <a:srgbClr val="6B7280"/>
+              </a:solidFill>
+              <a:latin typeface="Aptos"/>
+              <a:ea typeface="Aptos"/>
+              <a:cs typeface="Aptos"/>
+            </a:endParaRPr>
           </a:p>
         </p:txBody>
       </p:sp>
